--- a/diagrams/num_hal.pptx
+++ b/diagrams/num_hal.pptx
@@ -3121,7 +3121,7 @@
       </p:sp>
       <p:pic>
         <p:nvPicPr>
-          <p:cNvPr id="3" name="Picture 2" descr="num_acc_2.png"/>
+          <p:cNvPr id="3" name="Picture 2" descr="num_hal.png"/>
           <p:cNvPicPr>
             <a:picLocks noChangeAspect="1"/>
           </p:cNvPicPr>
